--- a/examples/hello-table/fixtures/deck.msoffice-edited.pptx
+++ b/examples/hello-table/fixtures/deck.msoffice-edited.pptx
@@ -3332,7 +3332,7 @@
 
 <file path=ppt/slides/slide1.xml><?xml version="1.0" encoding="utf-8"?>
 <p:sld xmlns:a="http://schemas.openxmlformats.org/drawingml/2006/main" xmlns:r="http://schemas.openxmlformats.org/officeDocument/2006/relationships" xmlns:p="http://schemas.openxmlformats.org/presentationml/2006/main">
-  <p:cSld name="ox:b9f29acd-4be0-5345-b388-cb314338fa55">
+  <p:cSld name="mleaf:b9f29acd-4be0-5345-b388-cb314338fa55">
     <p:bg>
       <p:bgPr>
         <a:solidFill>
@@ -3357,7 +3357,7 @@
       </p:grpSpPr>
       <p:sp>
         <p:nvSpPr>
-          <p:cNvPr id="259" name="ox:79cf7543-79e8-551e-992b-1899612ea818"/>
+          <p:cNvPr id="259" name="mleaf:79cf7543-79e8-551e-992b-1899612ea818"/>
           <p:cNvSpPr txBox="1"/>
           <p:nvPr/>
         </p:nvSpPr>
@@ -3397,7 +3397,7 @@
       </p:sp>
       <p:sp>
         <p:nvSpPr>
-          <p:cNvPr id="260" name="ox:b73a0317-a900-5035-8af5-41d456a76424"/>
+          <p:cNvPr id="260" name="mleaf:b73a0317-a900-5035-8af5-41d456a76424"/>
           <p:cNvSpPr txBox="1"/>
           <p:nvPr/>
         </p:nvSpPr>
@@ -3445,7 +3445,7 @@
 
 <file path=ppt/slides/slide2.xml><?xml version="1.0" encoding="utf-8"?>
 <p:sld xmlns:a="http://schemas.openxmlformats.org/drawingml/2006/main" xmlns:r="http://schemas.openxmlformats.org/officeDocument/2006/relationships" xmlns:p="http://schemas.openxmlformats.org/presentationml/2006/main">
-  <p:cSld name="ox:aa108021-6b33-5ae3-a0db-12b17e9592c4">
+  <p:cSld name="mleaf:aa108021-6b33-5ae3-a0db-12b17e9592c4">
     <p:bg>
       <p:bgPr>
         <a:solidFill>
@@ -3470,7 +3470,7 @@
       </p:grpSpPr>
       <p:sp>
         <p:nvSpPr>
-          <p:cNvPr id="262" name="ox:9b9cc37c-57d8-5294-896e-305ec1757883"/>
+          <p:cNvPr id="262" name="mleaf:9b9cc37c-57d8-5294-896e-305ec1757883"/>
           <p:cNvSpPr txBox="1"/>
           <p:nvPr/>
         </p:nvSpPr>
@@ -3510,7 +3510,7 @@
       </p:sp>
       <p:graphicFrame>
         <p:nvGraphicFramePr>
-          <p:cNvPr id="263" name="ox:987b7602-b694-53d2-b390-57f9d8ca3870"/>
+          <p:cNvPr id="263" name="mleaf:987b7602-b694-53d2-b390-57f9d8ca3870"/>
           <p:cNvGraphicFramePr>
             <a:graphicFrameLocks noGrp="1"/>
           </p:cNvGraphicFramePr>
@@ -3713,7 +3713,7 @@
       </p:graphicFrame>
       <p:graphicFrame>
         <p:nvGraphicFramePr>
-          <p:cNvPr id="264" name="ox:23ddaa1c-1c51-5324-8860-64ed833aa77f"/>
+          <p:cNvPr id="264" name="mleaf:23ddaa1c-1c51-5324-8860-64ed833aa77f"/>
           <p:cNvGraphicFramePr>
             <a:graphicFrameLocks noGrp="1"/>
           </p:cNvGraphicFramePr>
@@ -3731,7 +3731,7 @@
       </p:graphicFrame>
       <p:sp>
         <p:nvSpPr>
-          <p:cNvPr id="265" name="ox:1f3d316c-9724-5069-b314-93f167a63dbb"/>
+          <p:cNvPr id="265" name="mleaf:1f3d316c-9724-5069-b314-93f167a63dbb"/>
           <p:cNvSpPr txBox="1"/>
           <p:nvPr/>
         </p:nvSpPr>
@@ -3806,7 +3806,7 @@
 
 <file path=ppt/slides/slide3.xml><?xml version="1.0" encoding="utf-8"?>
 <p:sld xmlns:a="http://schemas.openxmlformats.org/drawingml/2006/main" xmlns:r="http://schemas.openxmlformats.org/officeDocument/2006/relationships" xmlns:p="http://schemas.openxmlformats.org/presentationml/2006/main">
-  <p:cSld name="ox:ad37e397-d236-5002-af7e-3682fbb922af">
+  <p:cSld name="mleaf:ad37e397-d236-5002-af7e-3682fbb922af">
     <p:bg>
       <p:bgPr>
         <a:solidFill>
@@ -3831,7 +3831,7 @@
       </p:grpSpPr>
       <p:sp>
         <p:nvSpPr>
-          <p:cNvPr id="267" name="ox:5b80e2c4-11e9-59eb-ba28-26372e59d240"/>
+          <p:cNvPr id="267" name="mleaf:5b80e2c4-11e9-59eb-ba28-26372e59d240"/>
           <p:cNvSpPr txBox="1"/>
           <p:nvPr/>
         </p:nvSpPr>
@@ -3871,7 +3871,7 @@
       </p:sp>
       <p:sp>
         <p:nvSpPr>
-          <p:cNvPr id="268" name="ox:fe7234e8-6154-5a93-9672-691664c55a4c"/>
+          <p:cNvPr id="268" name="mleaf:fe7234e8-6154-5a93-9672-691664c55a4c"/>
           <p:cNvSpPr txBox="1"/>
           <p:nvPr/>
         </p:nvSpPr>
@@ -3977,7 +3977,7 @@
       </p:sp>
       <p:pic>
         <p:nvPicPr>
-          <p:cNvPr id="269" name="ox:3dd13f43-6346-534e-a04d-fb73fa6e8967"/>
+          <p:cNvPr id="269" name="mleaf:3dd13f43-6346-534e-a04d-fb73fa6e8967"/>
           <p:cNvPicPr>
             <a:picLocks noChangeAspect="1"/>
           </p:cNvPicPr>

--- a/examples/hello-table/fixtures/deck.msoffice-edited.pptx
+++ b/examples/hello-table/fixtures/deck.msoffice-edited.pptx
@@ -177,7 +177,7 @@
           </c:val>
           <c:extLst>
             <c:ext xmlns:c16="http://schemas.microsoft.com/office/drawing/2014/chart" uri="{C3380CC4-5D6E-409C-BE32-E72D297353CC}">
-              <c16:uniqueId val="{00000000-60C5-AD4B-9867-77050676AF6D}"/>
+              <c16:uniqueId val="{00000000-87F0-DD4F-B094-EFA84DFFE421}"/>
             </c:ext>
           </c:extLst>
         </c:ser>
@@ -555,10 +555,10 @@
           <a:lstStyle/>
           <a:p>
             <a:r>
-              <a:rPr lang="en-US"/>
+              <a:rPr lang="en-US" dirty="0"/>
               <a:t>Open with the headline, then hand over to Finance.</a:t>
             </a:r>
-            <a:endParaRPr/>
+            <a:endParaRPr dirty="0"/>
           </a:p>
         </p:txBody>
       </p:sp>
@@ -3363,8 +3363,8 @@
         </p:nvSpPr>
         <p:spPr>
           <a:xfrm>
-            <a:off x="914400" y="2741295"/>
-            <a:ext cx="9525000" cy="828675"/>
+            <a:off x="914400" y="2739600"/>
+            <a:ext cx="9525000" cy="828000"/>
           </a:xfrm>
           <a:prstGeom prst="rect">
             <a:avLst/>
@@ -3384,7 +3384,7 @@
               <a:buNone/>
             </a:pPr>
             <a:r>
-              <a:rPr sz="5400" b="1">
+              <a:rPr sz="5400" b="1" dirty="0">
                 <a:solidFill>
                   <a:srgbClr val="FFFFFF"/>
                 </a:solidFill>
@@ -3424,7 +3424,7 @@
               <a:buNone/>
             </a:pPr>
             <a:r>
-              <a:rPr sz="2100">
+              <a:rPr sz="2100" dirty="0">
                 <a:solidFill>
                   <a:srgbClr val="FFFFFF"/>
                 </a:solidFill>
@@ -3517,7 +3517,7 @@
           <p:nvPr>
             <p:extLst>
               <p:ext uri="{D42A27DB-BD31-4B8C-83A1-F6EECF244321}">
-                <p14:modId xmlns:p14="http://schemas.microsoft.com/office/powerpoint/2010/main" val="3021655949"/>
+                <p14:modId xmlns:p14="http://schemas.microsoft.com/office/powerpoint/2010/main" val="1394951268"/>
               </p:ext>
             </p:extLst>
           </p:nvPr>
@@ -3572,7 +3572,7 @@
                     <a:p>
                       <a:pPr algn="r"/>
                       <a:r>
-                        <a:rPr sz="1650" b="1" dirty="0">
+                        <a:rPr sz="1650" b="1">
                           <a:latin typeface="Inter"/>
                         </a:rPr>
                         <a:t>Revenue</a:t>
@@ -3595,7 +3595,7 @@
                     <a:p>
                       <a:pPr algn="l"/>
                       <a:r>
-                        <a:rPr sz="1650" dirty="0">
+                        <a:rPr sz="1650">
                           <a:latin typeface="Inter"/>
                         </a:rPr>
                         <a:t>Adelaide</a:t>
@@ -3611,7 +3611,7 @@
                     <a:p>
                       <a:pPr algn="r"/>
                       <a:r>
-                        <a:rPr sz="1650" dirty="0">
+                        <a:rPr sz="1650">
                           <a:latin typeface="Inter"/>
                         </a:rPr>
                         <a:t>$412,000</a:t>
@@ -3634,7 +3634,7 @@
                     <a:p>
                       <a:pPr algn="l"/>
                       <a:r>
-                        <a:rPr sz="1650" dirty="0">
+                        <a:rPr sz="1650">
                           <a:latin typeface="Inter"/>
                         </a:rPr>
                         <a:t>Hong Kong</a:t>
@@ -3650,10 +3650,16 @@
                     <a:p>
                       <a:pPr algn="r"/>
                       <a:r>
+                        <a:rPr sz="1650" dirty="0">
+                          <a:latin typeface="Inter"/>
+                        </a:rPr>
+                        <a:t>$</a:t>
+                      </a:r>
+                      <a:r>
                         <a:rPr lang="en-AU" sz="1650" dirty="0">
                           <a:latin typeface="Inter"/>
                         </a:rPr>
-                        <a:t>$999</a:t>
+                        <a:t>999</a:t>
                       </a:r>
                       <a:endParaRPr sz="1650" dirty="0">
                         <a:latin typeface="Inter"/>
@@ -3758,25 +3764,25 @@
               <a:buNone/>
             </a:pPr>
             <a:r>
-              <a:rPr lang="en-US" sz="1950">
+              <a:rPr lang="en-AU" sz="1950" dirty="0">
                 <a:solidFill>
                   <a:srgbClr val="1D2433"/>
                 </a:solidFill>
                 <a:latin typeface="Inter"/>
               </a:rPr>
-              <a:t>Group </a:t>
+              <a:t>Group</a:t>
             </a:r>
             <a:r>
-              <a:rPr sz="1950">
+              <a:rPr sz="1950" dirty="0">
                 <a:solidFill>
                   <a:srgbClr val="1D2433"/>
                 </a:solidFill>
                 <a:latin typeface="Inter"/>
               </a:rPr>
-              <a:t>revenue: </a:t>
+              <a:t> revenue: </a:t>
             </a:r>
             <a:r>
-              <a:rPr sz="1950" b="1">
+              <a:rPr sz="1950" b="1" dirty="0">
                 <a:solidFill>
                   <a:srgbClr val="1D2433"/>
                 </a:solidFill>
@@ -3785,7 +3791,7 @@
               <a:t>$1,250,500</a:t>
             </a:r>
             <a:r>
-              <a:rPr sz="1950">
+              <a:rPr sz="1950" dirty="0">
                 <a:solidFill>
                   <a:srgbClr val="1D2433"/>
                 </a:solidFill>
@@ -3898,7 +3904,7 @@
               <a:buChar char="•"/>
             </a:pPr>
             <a:r>
-              <a:rPr sz="2100">
+              <a:rPr sz="2100" dirty="0">
                 <a:solidFill>
                   <a:srgbClr val="1D2433"/>
                 </a:solidFill>
@@ -3912,24 +3918,24 @@
               <a:buChar char="•"/>
             </a:pPr>
             <a:r>
-              <a:rPr sz="2100">
+              <a:rPr sz="2100" dirty="0">
                 <a:solidFill>
                   <a:srgbClr val="1D2433"/>
                 </a:solidFill>
                 <a:latin typeface="Inter"/>
               </a:rPr>
-              <a:t>Singapore pipeline </a:t>
+              <a:t>Singapore pipeline review</a:t>
             </a:r>
             <a:r>
-              <a:rPr lang="en-US" sz="2100">
+              <a:rPr lang="en-AU" sz="2100" dirty="0">
                 <a:solidFill>
                   <a:srgbClr val="1D2433"/>
                 </a:solidFill>
                 <a:latin typeface="Inter"/>
               </a:rPr>
-              <a:t>review (two deals)</a:t>
+              <a:t> (two deals)</a:t>
             </a:r>
-            <a:endParaRPr sz="2100">
+            <a:endParaRPr sz="2100" dirty="0">
               <a:solidFill>
                 <a:srgbClr val="1D2433"/>
               </a:solidFill>
@@ -3941,7 +3947,7 @@
               <a:buChar char="•"/>
             </a:pPr>
             <a:r>
-              <a:rPr sz="2100">
+              <a:rPr sz="2100" dirty="0">
                 <a:solidFill>
                   <a:srgbClr val="1D2433"/>
                 </a:solidFill>
@@ -3955,7 +3961,7 @@
               <a:buChar char="•"/>
             </a:pPr>
             <a:r>
-              <a:rPr sz="2100" i="1">
+              <a:rPr sz="2100" i="1" dirty="0">
                 <a:solidFill>
                   <a:srgbClr val="1D2433"/>
                 </a:solidFill>
@@ -3964,7 +3970,7 @@
               <a:t>Board decision:</a:t>
             </a:r>
             <a:r>
-              <a:rPr sz="2100">
+              <a:rPr sz="2100" dirty="0">
                 <a:solidFill>
                   <a:srgbClr val="1D2433"/>
                 </a:solidFill>
@@ -4001,10 +4007,10 @@
       </p:pic>
       <p:sp>
         <p:nvSpPr>
-          <p:cNvPr id="2" name="TextBox 1">
+          <p:cNvPr id="3" name="TextBox 2">
             <a:extLst>
               <a:ext uri="{FF2B5EF4-FFF2-40B4-BE49-F238E27FC236}">
-                <a16:creationId xmlns:a16="http://schemas.microsoft.com/office/drawing/2014/main" id="{F5DA9A06-4064-C9D7-765E-81F387301CC3}"/>
+                <a16:creationId xmlns:a16="http://schemas.microsoft.com/office/drawing/2014/main" id="{42D1D47C-BF37-AE8D-5F61-FD9F9AE468EF}"/>
               </a:ext>
             </a:extLst>
           </p:cNvPr>
@@ -4013,8 +4019,8 @@
         </p:nvSpPr>
         <p:spPr>
           <a:xfrm>
-            <a:off x="914400" y="5461000"/>
-            <a:ext cx="3810000" cy="381000"/>
+            <a:off x="762000" y="5955268"/>
+            <a:ext cx="6098058" cy="369332"/>
           </a:xfrm>
           <a:prstGeom prst="rect">
             <a:avLst/>
@@ -4022,13 +4028,13 @@
           <a:noFill/>
         </p:spPr>
         <p:txBody>
-          <a:bodyPr vert="horz" rtlCol="0">
+          <a:bodyPr wrap="square">
             <a:spAutoFit/>
           </a:bodyPr>
           <a:lstStyle/>
           <a:p>
             <a:r>
-              <a:rPr lang="en-US"/>
+              <a:rPr lang="en-US" dirty="0"/>
               <a:t>Owner: Finance</a:t>
             </a:r>
           </a:p>
